--- a/Course07/slides.pptx
+++ b/Course07/slides.pptx
@@ -3951,11 +3951,18 @@
           </a:bodyPr>
           <a:lstStyle/>
           <a:p>
+            <a:pPr lvl="0" indent="0" marL="0">
+              <a:buNone/>
+            </a:pPr>
             <a:r>
-              <a:rPr lang="en-US" sz="6000" dirty="0"/>
-              <a:t>Layers Types I</a:t>
+              <a:rPr lang="en-US" sz="4400"/>
+              <a:t>Session 7</a:t>
             </a:r>
-            <a:endParaRPr lang="en-US" sz="6000" i="1" dirty="0"/>
+            <a:br/>
+            <a:r>
+              <a:rPr lang="en-US" sz="4400"/>
+              <a:t>Width vs Depth</a:t>
+            </a:r>
           </a:p>
         </p:txBody>
       </p:sp>
@@ -3977,18 +3984,62 @@
         </p:nvSpPr>
         <p:spPr/>
         <p:txBody>
-          <a:bodyPr/>
+          <a:bodyPr>
+            <a:normAutofit/>
+          </a:bodyPr>
           <a:lstStyle/>
           <a:p>
+            <a:pPr lvl="0" indent="0" marL="0">
+              <a:buNone/>
+            </a:pPr>
             <a:r>
-              <a:rPr lang="en-US" dirty="0">
+              <a:rPr lang="en-US">
                 <a:solidFill>
                   <a:schemeClr val="bg1">
                     <a:lumMod val="50000"/>
                   </a:schemeClr>
                 </a:solidFill>
               </a:rPr>
-              <a:t>Lecture 4/10</a:t>
+              <a:t>Advanced Data Science · NYU Paris · 2026</a:t>
+            </a:r>
+            <a:br/>
+            <a:br/>
+            <a:r>
+              <a:rPr lang="en-US">
+                <a:solidFill>
+                  <a:schemeClr val="bg1">
+                    <a:lumMod val="50000"/>
+                  </a:schemeClr>
+                </a:solidFill>
+              </a:rPr>
+              <a:t>Paul Dubois</a:t>
+            </a:r>
+          </a:p>
+        </p:txBody>
+      </p:sp>
+      <p:sp>
+        <p:nvSpPr>
+          <p:cNvPr id="4" name="Date Placeholder 3"/>
+          <p:cNvSpPr>
+            <a:spLocks noGrp="1"/>
+          </p:cNvSpPr>
+          <p:nvPr>
+            <p:ph idx="10" sz="half" type="dt"/>
+          </p:nvPr>
+        </p:nvSpPr>
+        <p:spPr/>
+        <p:txBody>
+          <a:bodyPr>
+            <a:normAutofit/>
+          </a:bodyPr>
+          <a:lstStyle/>
+          <a:p>
+            <a:pPr lvl="0" indent="0" marL="0">
+              <a:buNone/>
+            </a:pPr>
+            <a:r>
+              <a:rPr lang="en-US"/>
+              <a:t>Week 7 — Lecture</a:t>
             </a:r>
           </a:p>
         </p:txBody>
